--- a/public/fun/cards/finance/finance-18.pptx
+++ b/public/fun/cards/finance/finance-18.pptx
@@ -3099,43 +3099,14 @@
       <p:grpSpPr/>
       <p:sp>
         <p:nvSpPr>
-          <p:cNvPr id="2" name="Rectangle 1"/>
-          <p:cNvSpPr/>
+          <p:cNvPr id="2" name="텍스트"/>
+          <p:cNvSpPr txBox="1"/>
           <p:nvPr/>
         </p:nvSpPr>
         <p:spPr>
           <a:xfrm>
-            <a:off x="1944000" y="216000"/>
-            <a:ext cx="10800" cy="1368000"/>
-          </a:xfrm>
-          <a:prstGeom prst="rect">
-            <a:avLst/>
-          </a:prstGeom>
-          <a:solidFill>
-            <a:srgbClr val="2B8245"/>
-          </a:solidFill>
-          <a:ln>
-            <a:noFill/>
-          </a:ln>
-        </p:spPr>
-        <p:txBody>
-          <a:bodyPr rtlCol="0" anchor="ctr"/>
-          <a:lstStyle/>
-          <a:p>
-            <a:pPr algn="ctr"/>
-          </a:p>
-        </p:txBody>
-      </p:sp>
-      <p:sp>
-        <p:nvSpPr>
-          <p:cNvPr id="3" name="텍스트"/>
-          <p:cNvSpPr txBox="1"/>
-          <p:nvPr/>
-        </p:nvSpPr>
-        <p:spPr>
-          <a:xfrm>
-            <a:off x="216000" y="201600"/>
-            <a:ext cx="1584000" cy="100800"/>
+            <a:off x="252000" y="223200"/>
+            <a:ext cx="2016000" cy="133351"/>
           </a:xfrm>
           <a:prstGeom prst="rect">
             <a:avLst/>
@@ -3154,9 +3125,9 @@
               </a:lnSpc>
             </a:pPr>
             <a:r>
-              <a:rPr sz="700" b="1" spc="300">
+              <a:rPr sz="700" b="1" spc="200">
                 <a:solidFill>
-                  <a:srgbClr val="617B69"/>
+                  <a:srgbClr val="6B7280"/>
                 </a:solidFill>
                 <a:latin typeface="맑은 고딕"/>
                 <a:ea typeface="맑은 고딕"/>
@@ -3168,106 +3139,14 @@
       </p:sp>
       <p:sp>
         <p:nvSpPr>
-          <p:cNvPr id="4" name="Oval 3"/>
-          <p:cNvSpPr/>
+          <p:cNvPr id="3" name="텍스트"/>
+          <p:cNvSpPr txBox="1"/>
           <p:nvPr/>
         </p:nvSpPr>
         <p:spPr>
           <a:xfrm>
-            <a:off x="291456" y="478224"/>
-            <a:ext cx="95040" cy="95040"/>
-          </a:xfrm>
-          <a:prstGeom prst="ellipse">
-            <a:avLst/>
-          </a:prstGeom>
-          <a:noFill/>
-          <a:ln w="21384">
-            <a:solidFill>
-              <a:srgbClr val="2B8245"/>
-            </a:solidFill>
-          </a:ln>
-        </p:spPr>
-        <p:txBody>
-          <a:bodyPr rtlCol="0" anchor="ctr"/>
-          <a:lstStyle/>
-          <a:p>
-            <a:pPr algn="ctr"/>
-          </a:p>
-        </p:txBody>
-      </p:sp>
-      <p:cxnSp>
-        <p:nvCxnSpPr>
-          <p:cNvPr id="5" name="Connector 4"/>
-          <p:cNvCxnSpPr/>
-          <p:nvPr/>
-        </p:nvCxnSpPr>
-        <p:spPr>
-          <a:xfrm>
-            <a:off x="381744" y="525744"/>
-            <a:ext cx="118800" cy="0"/>
-          </a:xfrm>
-          <a:prstGeom prst="line">
-            <a:avLst/>
-          </a:prstGeom>
-          <a:ln w="21384">
-            <a:solidFill>
-              <a:srgbClr val="2B8245"/>
-            </a:solidFill>
-          </a:ln>
-        </p:spPr>
-      </p:cxnSp>
-      <p:cxnSp>
-        <p:nvCxnSpPr>
-          <p:cNvPr id="6" name="Connector 5"/>
-          <p:cNvCxnSpPr/>
-          <p:nvPr/>
-        </p:nvCxnSpPr>
-        <p:spPr>
-          <a:xfrm>
-            <a:off x="467280" y="525744"/>
-            <a:ext cx="0" cy="42768"/>
-          </a:xfrm>
-          <a:prstGeom prst="line">
-            <a:avLst/>
-          </a:prstGeom>
-          <a:ln w="19008">
-            <a:solidFill>
-              <a:srgbClr val="D0F1DA"/>
-            </a:solidFill>
-          </a:ln>
-        </p:spPr>
-      </p:cxnSp>
-      <p:cxnSp>
-        <p:nvCxnSpPr>
-          <p:cNvPr id="7" name="Connector 6"/>
-          <p:cNvCxnSpPr/>
-          <p:nvPr/>
-        </p:nvCxnSpPr>
-        <p:spPr>
-          <a:xfrm>
-            <a:off x="500544" y="525744"/>
-            <a:ext cx="0" cy="52272"/>
-          </a:xfrm>
-          <a:prstGeom prst="line">
-            <a:avLst/>
-          </a:prstGeom>
-          <a:ln w="19008">
-            <a:solidFill>
-              <a:srgbClr val="D0F1DA"/>
-            </a:solidFill>
-          </a:ln>
-        </p:spPr>
-      </p:cxnSp>
-      <p:sp>
-        <p:nvSpPr>
-          <p:cNvPr id="8" name="텍스트"/>
-          <p:cNvSpPr txBox="1"/>
-          <p:nvPr/>
-        </p:nvSpPr>
-        <p:spPr>
-          <a:xfrm>
-            <a:off x="216000" y="972000"/>
-            <a:ext cx="1728000" cy="122400"/>
+            <a:off x="252000" y="468000"/>
+            <a:ext cx="2520000" cy="360000"/>
           </a:xfrm>
           <a:prstGeom prst="rect">
             <a:avLst/>
@@ -3282,32 +3161,32 @@
           <a:p>
             <a:pPr algn="l">
               <a:lnSpc>
-                <a:spcPts val="1232"/>
+                <a:spcPts val="3190"/>
               </a:lnSpc>
             </a:pPr>
             <a:r>
-              <a:rPr sz="850" b="1">
+              <a:rPr sz="2200" b="1">
                 <a:solidFill>
-                  <a:srgbClr val="2B8245"/>
+                  <a:srgbClr val="12151C"/>
                 </a:solidFill>
                 <a:latin typeface="맑은 고딕"/>
                 <a:ea typeface="맑은 고딕"/>
               </a:rPr>
-              <a:t>투자 상담역</a:t>
-            </a:r>
-          </a:p>
-        </p:txBody>
-      </p:sp>
-      <p:sp>
-        <p:nvSpPr>
-          <p:cNvPr id="9" name="텍스트"/>
+              <a:t>송현우</a:t>
+            </a:r>
+          </a:p>
+        </p:txBody>
+      </p:sp>
+      <p:sp>
+        <p:nvSpPr>
+          <p:cNvPr id="4" name="텍스트"/>
           <p:cNvSpPr txBox="1"/>
           <p:nvPr/>
         </p:nvSpPr>
         <p:spPr>
           <a:xfrm>
-            <a:off x="216000" y="1123200"/>
-            <a:ext cx="1728000" cy="346712"/>
+            <a:off x="252000" y="871200"/>
+            <a:ext cx="2520000" cy="171451"/>
           </a:xfrm>
           <a:prstGeom prst="rect">
             <a:avLst/>
@@ -3322,32 +3201,32 @@
           <a:p>
             <a:pPr algn="l">
               <a:lnSpc>
-                <a:spcPts val="3045"/>
+                <a:spcPts val="1305"/>
               </a:lnSpc>
             </a:pPr>
             <a:r>
-              <a:rPr sz="2100" b="1" spc="50">
+              <a:rPr sz="900" b="0">
                 <a:solidFill>
-                  <a:srgbClr val="143D21"/>
+                  <a:srgbClr val="6B7280"/>
                 </a:solidFill>
-                <a:latin typeface="바탕"/>
-                <a:ea typeface="바탕"/>
+                <a:latin typeface="맑은 고딕"/>
+                <a:ea typeface="맑은 고딕"/>
               </a:rPr>
-              <a:t>송현우</a:t>
-            </a:r>
-          </a:p>
-        </p:txBody>
-      </p:sp>
-      <p:sp>
-        <p:nvSpPr>
-          <p:cNvPr id="10" name="텍스트"/>
+              <a:t>투자 상담역</a:t>
+            </a:r>
+          </a:p>
+        </p:txBody>
+      </p:sp>
+      <p:sp>
+        <p:nvSpPr>
+          <p:cNvPr id="5" name="텍스트"/>
           <p:cNvSpPr txBox="1"/>
           <p:nvPr/>
         </p:nvSpPr>
         <p:spPr>
           <a:xfrm>
-            <a:off x="2073600" y="540000"/>
-            <a:ext cx="122400" cy="168911"/>
+            <a:off x="252000" y="1216800"/>
+            <a:ext cx="2520000" cy="129541"/>
           </a:xfrm>
           <a:prstGeom prst="rect">
             <a:avLst/>
@@ -3362,32 +3241,61 @@
           <a:p>
             <a:pPr algn="l">
               <a:lnSpc>
-                <a:spcPts val="1015"/>
+                <a:spcPts val="986"/>
               </a:lnSpc>
             </a:pPr>
             <a:r>
-              <a:rPr sz="700" b="1">
+              <a:rPr sz="680" b="0">
                 <a:solidFill>
-                  <a:srgbClr val="2B8245"/>
+                  <a:srgbClr val="6B7280"/>
                 </a:solidFill>
                 <a:latin typeface="맑은 고딕"/>
                 <a:ea typeface="맑은 고딕"/>
               </a:rPr>
-              <a:t>T</a:t>
-            </a:r>
-          </a:p>
-        </p:txBody>
-      </p:sp>
-      <p:sp>
-        <p:nvSpPr>
-          <p:cNvPr id="11" name="텍스트"/>
+              <a:t>주소를 입력해 주세요</a:t>
+            </a:r>
+          </a:p>
+        </p:txBody>
+      </p:sp>
+      <p:sp>
+        <p:nvSpPr>
+          <p:cNvPr id="6" name="Rectangle 5"/>
+          <p:cNvSpPr/>
+          <p:nvPr/>
+        </p:nvSpPr>
+        <p:spPr>
+          <a:xfrm>
+            <a:off x="0" y="1476000"/>
+            <a:ext cx="3240000" cy="324000"/>
+          </a:xfrm>
+          <a:prstGeom prst="rect">
+            <a:avLst/>
+          </a:prstGeom>
+          <a:solidFill>
+            <a:srgbClr val="FFC800"/>
+          </a:solidFill>
+          <a:ln>
+            <a:noFill/>
+          </a:ln>
+        </p:spPr>
+        <p:txBody>
+          <a:bodyPr rtlCol="0" anchor="ctr"/>
+          <a:lstStyle/>
+          <a:p>
+            <a:pPr algn="ctr"/>
+          </a:p>
+        </p:txBody>
+      </p:sp>
+      <p:sp>
+        <p:nvSpPr>
+          <p:cNvPr id="7" name="텍스트"/>
           <p:cNvSpPr txBox="1"/>
           <p:nvPr/>
         </p:nvSpPr>
         <p:spPr>
           <a:xfrm>
-            <a:off x="2217600" y="540000"/>
-            <a:ext cx="900000" cy="168911"/>
+            <a:off x="252000" y="1569600"/>
+            <a:ext cx="1296000" cy="133351"/>
           </a:xfrm>
           <a:prstGeom prst="rect">
             <a:avLst/>
@@ -3406,9 +3314,9 @@
               </a:lnSpc>
             </a:pPr>
             <a:r>
-              <a:rPr sz="700" b="0">
+              <a:rPr sz="700" b="1">
                 <a:solidFill>
-                  <a:srgbClr val="143D21"/>
+                  <a:srgbClr val="12151C"/>
                 </a:solidFill>
                 <a:latin typeface="맑은 고딕"/>
                 <a:ea typeface="맑은 고딕"/>
@@ -3420,14 +3328,14 @@
       </p:sp>
       <p:sp>
         <p:nvSpPr>
-          <p:cNvPr id="12" name="텍스트"/>
+          <p:cNvPr id="8" name="텍스트"/>
           <p:cNvSpPr txBox="1"/>
           <p:nvPr/>
         </p:nvSpPr>
         <p:spPr>
           <a:xfrm>
-            <a:off x="2073600" y="708911"/>
-            <a:ext cx="122400" cy="168911"/>
+            <a:off x="1656000" y="1569600"/>
+            <a:ext cx="1368000" cy="133351"/>
           </a:xfrm>
           <a:prstGeom prst="rect">
             <a:avLst/>
@@ -3448,132 +3356,12 @@
             <a:r>
               <a:rPr sz="700" b="1">
                 <a:solidFill>
-                  <a:srgbClr val="2B8245"/>
-                </a:solidFill>
-                <a:latin typeface="맑은 고딕"/>
-                <a:ea typeface="맑은 고딕"/>
-              </a:rPr>
-              <a:t>E</a:t>
-            </a:r>
-          </a:p>
-        </p:txBody>
-      </p:sp>
-      <p:sp>
-        <p:nvSpPr>
-          <p:cNvPr id="13" name="텍스트"/>
-          <p:cNvSpPr txBox="1"/>
-          <p:nvPr/>
-        </p:nvSpPr>
-        <p:spPr>
-          <a:xfrm>
-            <a:off x="2217600" y="708911"/>
-            <a:ext cx="900000" cy="168911"/>
-          </a:xfrm>
-          <a:prstGeom prst="rect">
-            <a:avLst/>
-          </a:prstGeom>
-          <a:noFill/>
-        </p:spPr>
-        <p:txBody>
-          <a:bodyPr wrap="square" lIns="0" rIns="0" tIns="0" bIns="0" anchor="t">
-            <a:spAutoFit/>
-          </a:bodyPr>
-          <a:lstStyle/>
-          <a:p>
-            <a:pPr algn="l">
-              <a:lnSpc>
-                <a:spcPts val="1015"/>
-              </a:lnSpc>
-            </a:pPr>
-            <a:r>
-              <a:rPr sz="700" b="0">
-                <a:solidFill>
-                  <a:srgbClr val="143D21"/>
+                  <a:srgbClr val="12151C"/>
                 </a:solidFill>
                 <a:latin typeface="맑은 고딕"/>
                 <a:ea typeface="맑은 고딕"/>
               </a:rPr>
               <a:t>name@example.com</a:t>
-            </a:r>
-          </a:p>
-        </p:txBody>
-      </p:sp>
-      <p:sp>
-        <p:nvSpPr>
-          <p:cNvPr id="14" name="텍스트"/>
-          <p:cNvSpPr txBox="1"/>
-          <p:nvPr/>
-        </p:nvSpPr>
-        <p:spPr>
-          <a:xfrm>
-            <a:off x="2073600" y="877822"/>
-            <a:ext cx="122400" cy="168911"/>
-          </a:xfrm>
-          <a:prstGeom prst="rect">
-            <a:avLst/>
-          </a:prstGeom>
-          <a:noFill/>
-        </p:spPr>
-        <p:txBody>
-          <a:bodyPr wrap="square" lIns="0" rIns="0" tIns="0" bIns="0" anchor="t">
-            <a:spAutoFit/>
-          </a:bodyPr>
-          <a:lstStyle/>
-          <a:p>
-            <a:pPr algn="l">
-              <a:lnSpc>
-                <a:spcPts val="1015"/>
-              </a:lnSpc>
-            </a:pPr>
-            <a:r>
-              <a:rPr sz="700" b="1">
-                <a:solidFill>
-                  <a:srgbClr val="2B8245"/>
-                </a:solidFill>
-                <a:latin typeface="맑은 고딕"/>
-                <a:ea typeface="맑은 고딕"/>
-              </a:rPr>
-              <a:t>A</a:t>
-            </a:r>
-          </a:p>
-        </p:txBody>
-      </p:sp>
-      <p:sp>
-        <p:nvSpPr>
-          <p:cNvPr id="15" name="텍스트"/>
-          <p:cNvSpPr txBox="1"/>
-          <p:nvPr/>
-        </p:nvSpPr>
-        <p:spPr>
-          <a:xfrm>
-            <a:off x="2217600" y="877822"/>
-            <a:ext cx="900000" cy="168911"/>
-          </a:xfrm>
-          <a:prstGeom prst="rect">
-            <a:avLst/>
-          </a:prstGeom>
-          <a:noFill/>
-        </p:spPr>
-        <p:txBody>
-          <a:bodyPr wrap="square" lIns="0" rIns="0" tIns="0" bIns="0" anchor="t">
-            <a:spAutoFit/>
-          </a:bodyPr>
-          <a:lstStyle/>
-          <a:p>
-            <a:pPr algn="l">
-              <a:lnSpc>
-                <a:spcPts val="1015"/>
-              </a:lnSpc>
-            </a:pPr>
-            <a:r>
-              <a:rPr sz="700" b="0">
-                <a:solidFill>
-                  <a:srgbClr val="143D21"/>
-                </a:solidFill>
-                <a:latin typeface="맑은 고딕"/>
-                <a:ea typeface="맑은 고딕"/>
-              </a:rPr>
-              <a:t>주소를 입력해 주세요</a:t>
             </a:r>
           </a:p>
         </p:txBody>
@@ -3592,7 +3380,7 @@
     <p:bg>
       <p:bgPr>
         <a:solidFill>
-          <a:srgbClr val="FFFFFF"/>
+          <a:srgbClr val="FFFAE6"/>
         </a:solidFill>
         <a:effectLst/>
       </p:bgPr>
@@ -3606,20 +3394,20 @@
       <p:grpSpPr/>
       <p:sp>
         <p:nvSpPr>
-          <p:cNvPr id="2" name="Rectangle 1"/>
+          <p:cNvPr id="2" name="Oval 1"/>
           <p:cNvSpPr/>
           <p:nvPr/>
         </p:nvSpPr>
         <p:spPr>
           <a:xfrm>
-            <a:off x="0" y="0"/>
-            <a:ext cx="64800" cy="1800000"/>
+            <a:off x="1411200" y="295200"/>
+            <a:ext cx="417600" cy="417600"/>
           </a:xfrm>
-          <a:prstGeom prst="rect">
+          <a:prstGeom prst="ellipse">
             <a:avLst/>
           </a:prstGeom>
           <a:solidFill>
-            <a:srgbClr val="335299"/>
+            <a:srgbClr val="FFC800"/>
           </a:solidFill>
           <a:ln>
             <a:noFill/>
@@ -3641,8 +3429,8 @@
         </p:nvSpPr>
         <p:spPr>
           <a:xfrm>
-            <a:off x="252000" y="432000"/>
-            <a:ext cx="2016000" cy="252000"/>
+            <a:off x="1368000" y="324000"/>
+            <a:ext cx="504000" cy="360000"/>
           </a:xfrm>
           <a:prstGeom prst="rect">
             <a:avLst/>
@@ -3650,25 +3438,25 @@
           <a:noFill/>
         </p:spPr>
         <p:txBody>
-          <a:bodyPr wrap="square" lIns="0" rIns="0" tIns="0" bIns="0" anchor="t">
+          <a:bodyPr wrap="square" lIns="0" rIns="0" tIns="0" bIns="0" anchor="ctr">
             <a:spAutoFit/>
           </a:bodyPr>
           <a:lstStyle/>
           <a:p>
-            <a:pPr algn="l">
+            <a:pPr algn="ctr">
               <a:lnSpc>
-                <a:spcPts val="2465"/>
+                <a:spcPts val="3769"/>
               </a:lnSpc>
             </a:pPr>
             <a:r>
-              <a:rPr sz="1700" b="1">
+              <a:rPr sz="2600" b="1">
                 <a:solidFill>
-                  <a:srgbClr val="19294D"/>
+                  <a:srgbClr val="12151C"/>
                 </a:solidFill>
-                <a:latin typeface="바탕"/>
-                <a:ea typeface="바탕"/>
+                <a:latin typeface="맑은 고딕"/>
+                <a:ea typeface="맑은 고딕"/>
               </a:rPr>
-              <a:t>회사 · 사무소 이름</a:t>
+              <a:t>회</a:t>
             </a:r>
           </a:p>
         </p:txBody>
@@ -3681,8 +3469,8 @@
         </p:nvSpPr>
         <p:spPr>
           <a:xfrm>
-            <a:off x="252000" y="878400"/>
-            <a:ext cx="2016000" cy="540000"/>
+            <a:off x="360000" y="820800"/>
+            <a:ext cx="2520000" cy="161926"/>
           </a:xfrm>
           <a:prstGeom prst="rect">
             <a:avLst/>
@@ -3695,20 +3483,20 @@
           </a:bodyPr>
           <a:lstStyle/>
           <a:p>
-            <a:pPr algn="l">
+            <a:pPr algn="ctr">
               <a:lnSpc>
                 <a:spcPts val="1232"/>
               </a:lnSpc>
             </a:pPr>
             <a:r>
-              <a:rPr sz="850" b="0">
+              <a:rPr sz="850" b="1" spc="200">
                 <a:solidFill>
-                  <a:srgbClr val="6A748B"/>
+                  <a:srgbClr val="12151C"/>
                 </a:solidFill>
-                <a:latin typeface="바탕"/>
-                <a:ea typeface="바탕"/>
+                <a:latin typeface="맑은 고딕"/>
+                <a:ea typeface="맑은 고딕"/>
               </a:rPr>
-              <a:t>숫자 뒤의 삶을 헤아립니다</a:t>
+              <a:t>회사 · 사무소 이름</a:t>
             </a:r>
           </a:p>
         </p:txBody>
@@ -3721,18 +3509,17 @@
         </p:nvSpPr>
         <p:spPr>
           <a:xfrm>
-            <a:off x="2520000" y="1080000"/>
-            <a:ext cx="504000" cy="504000"/>
+            <a:off x="1530000" y="1051200"/>
+            <a:ext cx="180000" cy="14400"/>
           </a:xfrm>
           <a:prstGeom prst="rect">
             <a:avLst/>
           </a:prstGeom>
-          <a:noFill/>
-          <a:ln w="9000">
-            <a:solidFill>
-              <a:srgbClr val="335299"/>
-            </a:solidFill>
-            <a:prstDash val="dash"/>
+          <a:solidFill>
+            <a:srgbClr val="FFC800"/>
+          </a:solidFill>
+          <a:ln>
+            <a:noFill/>
           </a:ln>
         </p:spPr>
         <p:txBody>
@@ -3751,8 +3538,8 @@
         </p:nvSpPr>
         <p:spPr>
           <a:xfrm>
-            <a:off x="2520000" y="1080000"/>
-            <a:ext cx="504000" cy="504000"/>
+            <a:off x="540000" y="1188000"/>
+            <a:ext cx="2160000" cy="360000"/>
           </a:xfrm>
           <a:prstGeom prst="rect">
             <a:avLst/>
@@ -3760,7 +3547,7 @@
           <a:noFill/>
         </p:spPr>
         <p:txBody>
-          <a:bodyPr wrap="square" lIns="0" rIns="0" tIns="0" bIns="0" anchor="ctr">
+          <a:bodyPr wrap="square" lIns="0" rIns="0" tIns="0" bIns="0" anchor="t">
             <a:spAutoFit/>
           </a:bodyPr>
           <a:lstStyle/>
@@ -3773,137 +3560,16 @@
             <a:r>
               <a:rPr sz="900" b="1">
                 <a:solidFill>
-                  <a:srgbClr val="6A748B"/>
+                  <a:srgbClr val="6C5911"/>
                 </a:solidFill>
                 <a:latin typeface="맑은 고딕"/>
                 <a:ea typeface="맑은 고딕"/>
               </a:rPr>
-              <a:t>QR</a:t>
-            </a:r>
-          </a:p>
-        </p:txBody>
-      </p:sp>
-      <p:sp>
-        <p:nvSpPr>
-          <p:cNvPr id="7" name="Rectangle 6"/>
-          <p:cNvSpPr/>
-          <p:nvPr/>
-        </p:nvSpPr>
-        <p:spPr>
-          <a:xfrm>
-            <a:off x="252000" y="763200"/>
-            <a:ext cx="201600" cy="14400"/>
-          </a:xfrm>
-          <a:prstGeom prst="rect">
-            <a:avLst/>
-          </a:prstGeom>
-          <a:solidFill>
-            <a:srgbClr val="335299"/>
-          </a:solidFill>
-          <a:ln>
-            <a:noFill/>
-          </a:ln>
-        </p:spPr>
-        <p:txBody>
-          <a:bodyPr rtlCol="0" anchor="ctr"/>
-          <a:lstStyle/>
-          <a:p>
-            <a:pPr algn="ctr"/>
-          </a:p>
-        </p:txBody>
-      </p:sp>
-      <p:sp>
-        <p:nvSpPr>
-          <p:cNvPr id="8" name="Oval 7"/>
-          <p:cNvSpPr/>
-          <p:nvPr/>
-        </p:nvSpPr>
-        <p:spPr>
-          <a:xfrm>
-            <a:off x="2629440" y="347760"/>
-            <a:ext cx="129600" cy="129600"/>
-          </a:xfrm>
-          <a:prstGeom prst="ellipse">
-            <a:avLst/>
-          </a:prstGeom>
-          <a:noFill/>
-          <a:ln w="29160">
-            <a:solidFill>
-              <a:srgbClr val="335299"/>
-            </a:solidFill>
-          </a:ln>
-        </p:spPr>
-        <p:txBody>
-          <a:bodyPr rtlCol="0" anchor="ctr"/>
-          <a:lstStyle/>
-          <a:p>
-            <a:pPr algn="ctr"/>
-          </a:p>
-        </p:txBody>
-      </p:sp>
-      <p:cxnSp>
-        <p:nvCxnSpPr>
-          <p:cNvPr id="9" name="Connector 8"/>
-          <p:cNvCxnSpPr/>
-          <p:nvPr/>
-        </p:nvCxnSpPr>
-        <p:spPr>
-          <a:xfrm>
-            <a:off x="2752560" y="412560"/>
-            <a:ext cx="162000" cy="0"/>
-          </a:xfrm>
-          <a:prstGeom prst="line">
-            <a:avLst/>
-          </a:prstGeom>
-          <a:ln w="29160">
-            <a:solidFill>
-              <a:srgbClr val="335299"/>
-            </a:solidFill>
-          </a:ln>
-        </p:spPr>
-      </p:cxnSp>
-      <p:cxnSp>
-        <p:nvCxnSpPr>
-          <p:cNvPr id="10" name="Connector 9"/>
-          <p:cNvCxnSpPr/>
-          <p:nvPr/>
-        </p:nvCxnSpPr>
-        <p:spPr>
-          <a:xfrm>
-            <a:off x="2869200" y="412560"/>
-            <a:ext cx="0" cy="58320"/>
-          </a:xfrm>
-          <a:prstGeom prst="line">
-            <a:avLst/>
-          </a:prstGeom>
-          <a:ln w="25920">
-            <a:solidFill>
-              <a:srgbClr val="D0DAF1"/>
-            </a:solidFill>
-          </a:ln>
-        </p:spPr>
-      </p:cxnSp>
-      <p:cxnSp>
-        <p:nvCxnSpPr>
-          <p:cNvPr id="11" name="Connector 10"/>
-          <p:cNvCxnSpPr/>
-          <p:nvPr/>
-        </p:nvCxnSpPr>
-        <p:spPr>
-          <a:xfrm>
-            <a:off x="2914560" y="412560"/>
-            <a:ext cx="0" cy="71280"/>
-          </a:xfrm>
-          <a:prstGeom prst="line">
-            <a:avLst/>
-          </a:prstGeom>
-          <a:ln w="25920">
-            <a:solidFill>
-              <a:srgbClr val="D0DAF1"/>
-            </a:solidFill>
-          </a:ln>
-        </p:spPr>
-      </p:cxnSp>
+              <a:t>숫자 뒤의 삶을 헤아립니다</a:t>
+            </a:r>
+          </a:p>
+        </p:txBody>
+      </p:sp>
     </p:spTree>
   </p:cSld>
   <p:clrMapOvr>

--- a/public/fun/cards/finance/finance-18.pptx
+++ b/public/fun/cards/finance/finance-18.pptx
@@ -3105,8 +3105,8 @@
         </p:nvSpPr>
         <p:spPr>
           <a:xfrm>
-            <a:off x="252000" y="223200"/>
-            <a:ext cx="2016000" cy="133351"/>
+            <a:off x="252000" y="252000"/>
+            <a:ext cx="1512000" cy="123826"/>
           </a:xfrm>
           <a:prstGeom prst="rect">
             <a:avLst/>
@@ -3121,11 +3121,11 @@
           <a:p>
             <a:pPr algn="l">
               <a:lnSpc>
-                <a:spcPts val="1015"/>
+                <a:spcPts val="942"/>
               </a:lnSpc>
             </a:pPr>
             <a:r>
-              <a:rPr sz="700" b="1" spc="200">
+              <a:rPr sz="650" b="1" spc="220">
                 <a:solidFill>
                   <a:srgbClr val="6B7280"/>
                 </a:solidFill>
@@ -3137,16 +3137,37 @@
           </a:p>
         </p:txBody>
       </p:sp>
-      <p:sp>
-        <p:nvSpPr>
-          <p:cNvPr id="3" name="텍스트"/>
+      <p:cxnSp>
+        <p:nvCxnSpPr>
+          <p:cNvPr id="3" name="Connector 2"/>
+          <p:cNvCxnSpPr/>
+          <p:nvPr/>
+        </p:nvCxnSpPr>
+        <p:spPr>
+          <a:xfrm>
+            <a:off x="252000" y="388800"/>
+            <a:ext cx="2736000" cy="0"/>
+          </a:xfrm>
+          <a:prstGeom prst="line">
+            <a:avLst/>
+          </a:prstGeom>
+          <a:ln w="3600">
+            <a:solidFill>
+              <a:srgbClr val="E3E5E9"/>
+            </a:solidFill>
+          </a:ln>
+        </p:spPr>
+      </p:cxnSp>
+      <p:sp>
+        <p:nvSpPr>
+          <p:cNvPr id="4" name="텍스트"/>
           <p:cNvSpPr txBox="1"/>
           <p:nvPr/>
         </p:nvSpPr>
         <p:spPr>
           <a:xfrm>
-            <a:off x="252000" y="468000"/>
-            <a:ext cx="2520000" cy="360000"/>
+            <a:off x="252000" y="576000"/>
+            <a:ext cx="1800000" cy="237600"/>
           </a:xfrm>
           <a:prstGeom prst="rect">
             <a:avLst/>
@@ -3161,11 +3182,11 @@
           <a:p>
             <a:pPr algn="l">
               <a:lnSpc>
-                <a:spcPts val="3190"/>
+                <a:spcPts val="1957"/>
               </a:lnSpc>
             </a:pPr>
             <a:r>
-              <a:rPr sz="2200" b="1">
+              <a:rPr sz="1350" b="1" spc="120">
                 <a:solidFill>
                   <a:srgbClr val="12151C"/>
                 </a:solidFill>
@@ -3179,14 +3200,14 @@
       </p:sp>
       <p:sp>
         <p:nvSpPr>
-          <p:cNvPr id="4" name="텍스트"/>
+          <p:cNvPr id="5" name="텍스트"/>
           <p:cNvSpPr txBox="1"/>
           <p:nvPr/>
         </p:nvSpPr>
         <p:spPr>
           <a:xfrm>
-            <a:off x="252000" y="871200"/>
-            <a:ext cx="2520000" cy="171451"/>
+            <a:off x="252000" y="828000"/>
+            <a:ext cx="1800000" cy="133351"/>
           </a:xfrm>
           <a:prstGeom prst="rect">
             <a:avLst/>
@@ -3201,11 +3222,11 @@
           <a:p>
             <a:pPr algn="l">
               <a:lnSpc>
-                <a:spcPts val="1305"/>
+                <a:spcPts val="1015"/>
               </a:lnSpc>
             </a:pPr>
             <a:r>
-              <a:rPr sz="900" b="0">
+              <a:rPr sz="700" b="0" spc="60">
                 <a:solidFill>
                   <a:srgbClr val="6B7280"/>
                 </a:solidFill>
@@ -3219,14 +3240,14 @@
       </p:sp>
       <p:sp>
         <p:nvSpPr>
-          <p:cNvPr id="5" name="텍스트"/>
+          <p:cNvPr id="6" name="텍스트"/>
           <p:cNvSpPr txBox="1"/>
           <p:nvPr/>
         </p:nvSpPr>
         <p:spPr>
           <a:xfrm>
-            <a:off x="252000" y="1216800"/>
-            <a:ext cx="2520000" cy="129541"/>
+            <a:off x="252000" y="1036800"/>
+            <a:ext cx="2520000" cy="123826"/>
           </a:xfrm>
           <a:prstGeom prst="rect">
             <a:avLst/>
@@ -3241,11 +3262,11 @@
           <a:p>
             <a:pPr algn="l">
               <a:lnSpc>
-                <a:spcPts val="986"/>
+                <a:spcPts val="942"/>
               </a:lnSpc>
             </a:pPr>
             <a:r>
-              <a:rPr sz="680" b="0">
+              <a:rPr sz="650" b="0">
                 <a:solidFill>
                   <a:srgbClr val="6B7280"/>
                 </a:solidFill>
@@ -3259,14 +3280,14 @@
       </p:sp>
       <p:sp>
         <p:nvSpPr>
-          <p:cNvPr id="6" name="Rectangle 5"/>
+          <p:cNvPr id="7" name="Rectangle 6"/>
           <p:cNvSpPr/>
           <p:nvPr/>
         </p:nvSpPr>
         <p:spPr>
           <a:xfrm>
-            <a:off x="0" y="1476000"/>
-            <a:ext cx="3240000" cy="324000"/>
+            <a:off x="0" y="1339200"/>
+            <a:ext cx="3240000" cy="460800"/>
           </a:xfrm>
           <a:prstGeom prst="rect">
             <a:avLst/>
@@ -3288,14 +3309,14 @@
       </p:sp>
       <p:sp>
         <p:nvSpPr>
-          <p:cNvPr id="7" name="텍스트"/>
+          <p:cNvPr id="8" name="텍스트"/>
           <p:cNvSpPr txBox="1"/>
           <p:nvPr/>
         </p:nvSpPr>
         <p:spPr>
           <a:xfrm>
-            <a:off x="252000" y="1569600"/>
-            <a:ext cx="1296000" cy="133351"/>
+            <a:off x="252000" y="1476000"/>
+            <a:ext cx="936000" cy="91441"/>
           </a:xfrm>
           <a:prstGeom prst="rect">
             <a:avLst/>
@@ -3310,11 +3331,53 @@
           <a:p>
             <a:pPr algn="l">
               <a:lnSpc>
-                <a:spcPts val="1015"/>
+                <a:spcPts val="696"/>
               </a:lnSpc>
             </a:pPr>
             <a:r>
-              <a:rPr sz="700" b="1">
+              <a:rPr sz="480" b="1" spc="140">
+                <a:solidFill>
+                  <a:srgbClr val="12151C">
+                    <a:alpha val="70000"/>
+                  </a:srgbClr>
+                </a:solidFill>
+                <a:latin typeface="맑은 고딕"/>
+                <a:ea typeface="맑은 고딕"/>
+              </a:rPr>
+              <a:t>TEL</a:t>
+            </a:r>
+          </a:p>
+        </p:txBody>
+      </p:sp>
+      <p:sp>
+        <p:nvSpPr>
+          <p:cNvPr id="9" name="텍스트"/>
+          <p:cNvSpPr txBox="1"/>
+          <p:nvPr/>
+        </p:nvSpPr>
+        <p:spPr>
+          <a:xfrm>
+            <a:off x="252000" y="1576800"/>
+            <a:ext cx="936000" cy="123826"/>
+          </a:xfrm>
+          <a:prstGeom prst="rect">
+            <a:avLst/>
+          </a:prstGeom>
+          <a:noFill/>
+        </p:spPr>
+        <p:txBody>
+          <a:bodyPr wrap="square" lIns="0" rIns="0" tIns="0" bIns="0" anchor="t">
+            <a:spAutoFit/>
+          </a:bodyPr>
+          <a:lstStyle/>
+          <a:p>
+            <a:pPr algn="l">
+              <a:lnSpc>
+                <a:spcPts val="942"/>
+              </a:lnSpc>
+            </a:pPr>
+            <a:r>
+              <a:rPr sz="650" b="1">
                 <a:solidFill>
                   <a:srgbClr val="12151C"/>
                 </a:solidFill>
@@ -3328,14 +3391,14 @@
       </p:sp>
       <p:sp>
         <p:nvSpPr>
-          <p:cNvPr id="8" name="텍스트"/>
+          <p:cNvPr id="10" name="텍스트"/>
           <p:cNvSpPr txBox="1"/>
           <p:nvPr/>
         </p:nvSpPr>
         <p:spPr>
           <a:xfrm>
-            <a:off x="1656000" y="1569600"/>
-            <a:ext cx="1368000" cy="133351"/>
+            <a:off x="1188000" y="1476000"/>
+            <a:ext cx="1080000" cy="91441"/>
           </a:xfrm>
           <a:prstGeom prst="rect">
             <a:avLst/>
@@ -3350,11 +3413,53 @@
           <a:p>
             <a:pPr algn="l">
               <a:lnSpc>
-                <a:spcPts val="1015"/>
+                <a:spcPts val="696"/>
               </a:lnSpc>
             </a:pPr>
             <a:r>
-              <a:rPr sz="700" b="1">
+              <a:rPr sz="480" b="1" spc="140">
+                <a:solidFill>
+                  <a:srgbClr val="12151C">
+                    <a:alpha val="70000"/>
+                  </a:srgbClr>
+                </a:solidFill>
+                <a:latin typeface="맑은 고딕"/>
+                <a:ea typeface="맑은 고딕"/>
+              </a:rPr>
+              <a:t>MAIL</a:t>
+            </a:r>
+          </a:p>
+        </p:txBody>
+      </p:sp>
+      <p:sp>
+        <p:nvSpPr>
+          <p:cNvPr id="11" name="텍스트"/>
+          <p:cNvSpPr txBox="1"/>
+          <p:nvPr/>
+        </p:nvSpPr>
+        <p:spPr>
+          <a:xfrm>
+            <a:off x="1188000" y="1576800"/>
+            <a:ext cx="1080000" cy="123826"/>
+          </a:xfrm>
+          <a:prstGeom prst="rect">
+            <a:avLst/>
+          </a:prstGeom>
+          <a:noFill/>
+        </p:spPr>
+        <p:txBody>
+          <a:bodyPr wrap="square" lIns="0" rIns="0" tIns="0" bIns="0" anchor="t">
+            <a:spAutoFit/>
+          </a:bodyPr>
+          <a:lstStyle/>
+          <a:p>
+            <a:pPr algn="l">
+              <a:lnSpc>
+                <a:spcPts val="942"/>
+              </a:lnSpc>
+            </a:pPr>
+            <a:r>
+              <a:rPr sz="650" b="1">
                 <a:solidFill>
                   <a:srgbClr val="12151C"/>
                 </a:solidFill>
@@ -3366,6 +3471,27 @@
           </a:p>
         </p:txBody>
       </p:sp>
+      <p:cxnSp>
+        <p:nvCxnSpPr>
+          <p:cNvPr id="12" name="Connector 11"/>
+          <p:cNvCxnSpPr/>
+          <p:nvPr/>
+        </p:nvCxnSpPr>
+        <p:spPr>
+          <a:xfrm>
+            <a:off x="1108800" y="1468800"/>
+            <a:ext cx="0" cy="208800"/>
+          </a:xfrm>
+          <a:prstGeom prst="line">
+            <a:avLst/>
+          </a:prstGeom>
+          <a:ln w="3600">
+            <a:solidFill>
+              <a:srgbClr val="12151C"/>
+            </a:solidFill>
+          </a:ln>
+        </p:spPr>
+      </p:cxnSp>
     </p:spTree>
   </p:cSld>
   <p:clrMapOvr>
@@ -3394,43 +3520,14 @@
       <p:grpSpPr/>
       <p:sp>
         <p:nvSpPr>
-          <p:cNvPr id="2" name="Oval 1"/>
-          <p:cNvSpPr/>
-          <p:nvPr/>
-        </p:nvSpPr>
-        <p:spPr>
-          <a:xfrm>
-            <a:off x="1411200" y="295200"/>
-            <a:ext cx="417600" cy="417600"/>
-          </a:xfrm>
-          <a:prstGeom prst="ellipse">
-            <a:avLst/>
-          </a:prstGeom>
-          <a:solidFill>
-            <a:srgbClr val="FFC800"/>
-          </a:solidFill>
-          <a:ln>
-            <a:noFill/>
-          </a:ln>
-        </p:spPr>
-        <p:txBody>
-          <a:bodyPr rtlCol="0" anchor="ctr"/>
-          <a:lstStyle/>
-          <a:p>
-            <a:pPr algn="ctr"/>
-          </a:p>
-        </p:txBody>
-      </p:sp>
-      <p:sp>
-        <p:nvSpPr>
-          <p:cNvPr id="3" name="텍스트"/>
+          <p:cNvPr id="2" name="텍스트"/>
           <p:cNvSpPr txBox="1"/>
           <p:nvPr/>
         </p:nvSpPr>
         <p:spPr>
           <a:xfrm>
-            <a:off x="1368000" y="324000"/>
-            <a:ext cx="504000" cy="360000"/>
+            <a:off x="252000" y="252000"/>
+            <a:ext cx="1080000" cy="99061"/>
           </a:xfrm>
           <a:prstGeom prst="rect">
             <a:avLst/>
@@ -3438,79 +3535,39 @@
           <a:noFill/>
         </p:spPr>
         <p:txBody>
-          <a:bodyPr wrap="square" lIns="0" rIns="0" tIns="0" bIns="0" anchor="ctr">
+          <a:bodyPr wrap="square" lIns="0" rIns="0" tIns="0" bIns="0" anchor="t">
             <a:spAutoFit/>
           </a:bodyPr>
           <a:lstStyle/>
           <a:p>
-            <a:pPr algn="ctr">
+            <a:pPr algn="l">
               <a:lnSpc>
-                <a:spcPts val="3769"/>
+                <a:spcPts val="754"/>
               </a:lnSpc>
             </a:pPr>
             <a:r>
-              <a:rPr sz="2600" b="1">
+              <a:rPr sz="520" b="1" spc="240">
                 <a:solidFill>
-                  <a:srgbClr val="12151C"/>
+                  <a:srgbClr val="6C5911"/>
                 </a:solidFill>
                 <a:latin typeface="맑은 고딕"/>
                 <a:ea typeface="맑은 고딕"/>
               </a:rPr>
-              <a:t>회</a:t>
-            </a:r>
-          </a:p>
-        </p:txBody>
-      </p:sp>
-      <p:sp>
-        <p:nvSpPr>
-          <p:cNvPr id="4" name="텍스트"/>
-          <p:cNvSpPr txBox="1"/>
-          <p:nvPr/>
-        </p:nvSpPr>
-        <p:spPr>
-          <a:xfrm>
-            <a:off x="360000" y="820800"/>
-            <a:ext cx="2520000" cy="161926"/>
-          </a:xfrm>
-          <a:prstGeom prst="rect">
-            <a:avLst/>
-          </a:prstGeom>
-          <a:noFill/>
-        </p:spPr>
-        <p:txBody>
-          <a:bodyPr wrap="square" lIns="0" rIns="0" tIns="0" bIns="0" anchor="t">
-            <a:spAutoFit/>
-          </a:bodyPr>
-          <a:lstStyle/>
-          <a:p>
-            <a:pPr algn="ctr">
-              <a:lnSpc>
-                <a:spcPts val="1232"/>
-              </a:lnSpc>
-            </a:pPr>
-            <a:r>
-              <a:rPr sz="850" b="1" spc="200">
-                <a:solidFill>
-                  <a:srgbClr val="12151C"/>
-                </a:solidFill>
-                <a:latin typeface="맑은 고딕"/>
-                <a:ea typeface="맑은 고딕"/>
-              </a:rPr>
-              <a:t>회사 · 사무소 이름</a:t>
-            </a:r>
-          </a:p>
-        </p:txBody>
-      </p:sp>
-      <p:sp>
-        <p:nvSpPr>
-          <p:cNvPr id="5" name="Rectangle 4"/>
+              <a:t>상담 분야</a:t>
+            </a:r>
+          </a:p>
+        </p:txBody>
+      </p:sp>
+      <p:sp>
+        <p:nvSpPr>
+          <p:cNvPr id="3" name="Rectangle 2"/>
           <p:cNvSpPr/>
           <p:nvPr/>
         </p:nvSpPr>
         <p:spPr>
           <a:xfrm>
-            <a:off x="1530000" y="1051200"/>
-            <a:ext cx="180000" cy="14400"/>
+            <a:off x="252000" y="367200"/>
+            <a:ext cx="108000" cy="14400"/>
           </a:xfrm>
           <a:prstGeom prst="rect">
             <a:avLst/>
@@ -3532,14 +3589,45 @@
       </p:sp>
       <p:sp>
         <p:nvSpPr>
-          <p:cNvPr id="6" name="텍스트"/>
+          <p:cNvPr id="4" name="Rounded Rectangle 3"/>
+          <p:cNvSpPr/>
+          <p:nvPr/>
+        </p:nvSpPr>
+        <p:spPr>
+          <a:xfrm>
+            <a:off x="252000" y="540000"/>
+            <a:ext cx="581567" cy="194361"/>
+          </a:xfrm>
+          <a:prstGeom prst="roundRect">
+            <a:avLst>
+              <a:gd name="adj" fmla="val 50000"/>
+            </a:avLst>
+          </a:prstGeom>
+          <a:noFill/>
+          <a:ln w="3600">
+            <a:solidFill>
+              <a:srgbClr val="6C5911"/>
+            </a:solidFill>
+          </a:ln>
+        </p:spPr>
+        <p:txBody>
+          <a:bodyPr rtlCol="0" anchor="ctr"/>
+          <a:lstStyle/>
+          <a:p>
+            <a:pPr algn="ctr"/>
+          </a:p>
+        </p:txBody>
+      </p:sp>
+      <p:sp>
+        <p:nvSpPr>
+          <p:cNvPr id="5" name="텍스트"/>
           <p:cNvSpPr txBox="1"/>
           <p:nvPr/>
         </p:nvSpPr>
         <p:spPr>
           <a:xfrm>
-            <a:off x="540000" y="1188000"/>
-            <a:ext cx="2160000" cy="360000"/>
+            <a:off x="252000" y="540000"/>
+            <a:ext cx="581567" cy="194361"/>
           </a:xfrm>
           <a:prstGeom prst="rect">
             <a:avLst/>
@@ -3547,25 +3635,459 @@
           <a:noFill/>
         </p:spPr>
         <p:txBody>
+          <a:bodyPr wrap="square" lIns="0" rIns="0" tIns="0" bIns="0" anchor="ctr">
+            <a:spAutoFit/>
+          </a:bodyPr>
+          <a:lstStyle/>
+          <a:p>
+            <a:pPr algn="ctr">
+              <a:lnSpc>
+                <a:spcPts val="986"/>
+              </a:lnSpc>
+            </a:pPr>
+            <a:r>
+              <a:rPr sz="680" b="0">
+                <a:solidFill>
+                  <a:srgbClr val="12151C"/>
+                </a:solidFill>
+                <a:latin typeface="맑은 고딕"/>
+                <a:ea typeface="맑은 고딕"/>
+              </a:rPr>
+              <a:t>보험 상담</a:t>
+            </a:r>
+          </a:p>
+        </p:txBody>
+      </p:sp>
+      <p:sp>
+        <p:nvSpPr>
+          <p:cNvPr id="6" name="Rounded Rectangle 5"/>
+          <p:cNvSpPr/>
+          <p:nvPr/>
+        </p:nvSpPr>
+        <p:spPr>
+          <a:xfrm>
+            <a:off x="883967" y="540000"/>
+            <a:ext cx="581567" cy="194361"/>
+          </a:xfrm>
+          <a:prstGeom prst="roundRect">
+            <a:avLst>
+              <a:gd name="adj" fmla="val 50000"/>
+            </a:avLst>
+          </a:prstGeom>
+          <a:noFill/>
+          <a:ln w="3600">
+            <a:solidFill>
+              <a:srgbClr val="6C5911"/>
+            </a:solidFill>
+          </a:ln>
+        </p:spPr>
+        <p:txBody>
+          <a:bodyPr rtlCol="0" anchor="ctr"/>
+          <a:lstStyle/>
+          <a:p>
+            <a:pPr algn="ctr"/>
+          </a:p>
+        </p:txBody>
+      </p:sp>
+      <p:sp>
+        <p:nvSpPr>
+          <p:cNvPr id="7" name="텍스트"/>
+          <p:cNvSpPr txBox="1"/>
+          <p:nvPr/>
+        </p:nvSpPr>
+        <p:spPr>
+          <a:xfrm>
+            <a:off x="883967" y="540000"/>
+            <a:ext cx="581567" cy="194361"/>
+          </a:xfrm>
+          <a:prstGeom prst="rect">
+            <a:avLst/>
+          </a:prstGeom>
+          <a:noFill/>
+        </p:spPr>
+        <p:txBody>
+          <a:bodyPr wrap="square" lIns="0" rIns="0" tIns="0" bIns="0" anchor="ctr">
+            <a:spAutoFit/>
+          </a:bodyPr>
+          <a:lstStyle/>
+          <a:p>
+            <a:pPr algn="ctr">
+              <a:lnSpc>
+                <a:spcPts val="986"/>
+              </a:lnSpc>
+            </a:pPr>
+            <a:r>
+              <a:rPr sz="680" b="0">
+                <a:solidFill>
+                  <a:srgbClr val="12151C"/>
+                </a:solidFill>
+                <a:latin typeface="맑은 고딕"/>
+                <a:ea typeface="맑은 고딕"/>
+              </a:rPr>
+              <a:t>연금 설계</a:t>
+            </a:r>
+          </a:p>
+        </p:txBody>
+      </p:sp>
+      <p:sp>
+        <p:nvSpPr>
+          <p:cNvPr id="8" name="Rounded Rectangle 7"/>
+          <p:cNvSpPr/>
+          <p:nvPr/>
+        </p:nvSpPr>
+        <p:spPr>
+          <a:xfrm>
+            <a:off x="1515933" y="540000"/>
+            <a:ext cx="581567" cy="194361"/>
+          </a:xfrm>
+          <a:prstGeom prst="roundRect">
+            <a:avLst>
+              <a:gd name="adj" fmla="val 50000"/>
+            </a:avLst>
+          </a:prstGeom>
+          <a:noFill/>
+          <a:ln w="3600">
+            <a:solidFill>
+              <a:srgbClr val="6C5911"/>
+            </a:solidFill>
+          </a:ln>
+        </p:spPr>
+        <p:txBody>
+          <a:bodyPr rtlCol="0" anchor="ctr"/>
+          <a:lstStyle/>
+          <a:p>
+            <a:pPr algn="ctr"/>
+          </a:p>
+        </p:txBody>
+      </p:sp>
+      <p:sp>
+        <p:nvSpPr>
+          <p:cNvPr id="9" name="텍스트"/>
+          <p:cNvSpPr txBox="1"/>
+          <p:nvPr/>
+        </p:nvSpPr>
+        <p:spPr>
+          <a:xfrm>
+            <a:off x="1515933" y="540000"/>
+            <a:ext cx="581567" cy="194361"/>
+          </a:xfrm>
+          <a:prstGeom prst="rect">
+            <a:avLst/>
+          </a:prstGeom>
+          <a:noFill/>
+        </p:spPr>
+        <p:txBody>
+          <a:bodyPr wrap="square" lIns="0" rIns="0" tIns="0" bIns="0" anchor="ctr">
+            <a:spAutoFit/>
+          </a:bodyPr>
+          <a:lstStyle/>
+          <a:p>
+            <a:pPr algn="ctr">
+              <a:lnSpc>
+                <a:spcPts val="986"/>
+              </a:lnSpc>
+            </a:pPr>
+            <a:r>
+              <a:rPr sz="680" b="0">
+                <a:solidFill>
+                  <a:srgbClr val="12151C"/>
+                </a:solidFill>
+                <a:latin typeface="맑은 고딕"/>
+                <a:ea typeface="맑은 고딕"/>
+              </a:rPr>
+              <a:t>투자 상담</a:t>
+            </a:r>
+          </a:p>
+        </p:txBody>
+      </p:sp>
+      <p:sp>
+        <p:nvSpPr>
+          <p:cNvPr id="10" name="Rounded Rectangle 9"/>
+          <p:cNvSpPr/>
+          <p:nvPr/>
+        </p:nvSpPr>
+        <p:spPr>
+          <a:xfrm>
+            <a:off x="2147900" y="540000"/>
+            <a:ext cx="581567" cy="194361"/>
+          </a:xfrm>
+          <a:prstGeom prst="roundRect">
+            <a:avLst>
+              <a:gd name="adj" fmla="val 50000"/>
+            </a:avLst>
+          </a:prstGeom>
+          <a:noFill/>
+          <a:ln w="3600">
+            <a:solidFill>
+              <a:srgbClr val="6C5911"/>
+            </a:solidFill>
+          </a:ln>
+        </p:spPr>
+        <p:txBody>
+          <a:bodyPr rtlCol="0" anchor="ctr"/>
+          <a:lstStyle/>
+          <a:p>
+            <a:pPr algn="ctr"/>
+          </a:p>
+        </p:txBody>
+      </p:sp>
+      <p:sp>
+        <p:nvSpPr>
+          <p:cNvPr id="11" name="텍스트"/>
+          <p:cNvSpPr txBox="1"/>
+          <p:nvPr/>
+        </p:nvSpPr>
+        <p:spPr>
+          <a:xfrm>
+            <a:off x="2147900" y="540000"/>
+            <a:ext cx="581567" cy="194361"/>
+          </a:xfrm>
+          <a:prstGeom prst="rect">
+            <a:avLst/>
+          </a:prstGeom>
+          <a:noFill/>
+        </p:spPr>
+        <p:txBody>
+          <a:bodyPr wrap="square" lIns="0" rIns="0" tIns="0" bIns="0" anchor="ctr">
+            <a:spAutoFit/>
+          </a:bodyPr>
+          <a:lstStyle/>
+          <a:p>
+            <a:pPr algn="ctr">
+              <a:lnSpc>
+                <a:spcPts val="986"/>
+              </a:lnSpc>
+            </a:pPr>
+            <a:r>
+              <a:rPr sz="680" b="0">
+                <a:solidFill>
+                  <a:srgbClr val="12151C"/>
+                </a:solidFill>
+                <a:latin typeface="맑은 고딕"/>
+                <a:ea typeface="맑은 고딕"/>
+              </a:rPr>
+              <a:t>증권 정리</a:t>
+            </a:r>
+          </a:p>
+        </p:txBody>
+      </p:sp>
+      <p:cxnSp>
+        <p:nvCxnSpPr>
+          <p:cNvPr id="12" name="Connector 11"/>
+          <p:cNvCxnSpPr/>
+          <p:nvPr/>
+        </p:nvCxnSpPr>
+        <p:spPr>
+          <a:xfrm>
+            <a:off x="252000" y="1339200"/>
+            <a:ext cx="2736000" cy="0"/>
+          </a:xfrm>
+          <a:prstGeom prst="line">
+            <a:avLst/>
+          </a:prstGeom>
+          <a:ln w="3600">
+            <a:solidFill>
+              <a:srgbClr val="FFF0B8"/>
+            </a:solidFill>
+          </a:ln>
+        </p:spPr>
+      </p:cxnSp>
+      <p:sp>
+        <p:nvSpPr>
+          <p:cNvPr id="13" name="텍스트"/>
+          <p:cNvSpPr txBox="1"/>
+          <p:nvPr/>
+        </p:nvSpPr>
+        <p:spPr>
+          <a:xfrm>
+            <a:off x="252000" y="1422000"/>
+            <a:ext cx="396000" cy="91441"/>
+          </a:xfrm>
+          <a:prstGeom prst="rect">
+            <a:avLst/>
+          </a:prstGeom>
+          <a:noFill/>
+        </p:spPr>
+        <p:txBody>
           <a:bodyPr wrap="square" lIns="0" rIns="0" tIns="0" bIns="0" anchor="t">
             <a:spAutoFit/>
           </a:bodyPr>
           <a:lstStyle/>
           <a:p>
-            <a:pPr algn="ctr">
+            <a:pPr algn="l">
               <a:lnSpc>
-                <a:spcPts val="1305"/>
+                <a:spcPts val="696"/>
               </a:lnSpc>
             </a:pPr>
             <a:r>
-              <a:rPr sz="900" b="1">
+              <a:rPr sz="480" b="1" spc="140">
                 <a:solidFill>
                   <a:srgbClr val="6C5911"/>
                 </a:solidFill>
                 <a:latin typeface="맑은 고딕"/>
                 <a:ea typeface="맑은 고딕"/>
               </a:rPr>
-              <a:t>숫자 뒤의 삶을 헤아립니다</a:t>
+              <a:t>HOURS</a:t>
+            </a:r>
+          </a:p>
+        </p:txBody>
+      </p:sp>
+      <p:sp>
+        <p:nvSpPr>
+          <p:cNvPr id="14" name="텍스트"/>
+          <p:cNvSpPr txBox="1"/>
+          <p:nvPr/>
+        </p:nvSpPr>
+        <p:spPr>
+          <a:xfrm>
+            <a:off x="648000" y="1411200"/>
+            <a:ext cx="2340000" cy="121921"/>
+          </a:xfrm>
+          <a:prstGeom prst="rect">
+            <a:avLst/>
+          </a:prstGeom>
+          <a:noFill/>
+        </p:spPr>
+        <p:txBody>
+          <a:bodyPr wrap="square" lIns="0" rIns="0" tIns="0" bIns="0" anchor="t">
+            <a:spAutoFit/>
+          </a:bodyPr>
+          <a:lstStyle/>
+          <a:p>
+            <a:pPr algn="l">
+              <a:lnSpc>
+                <a:spcPts val="927"/>
+              </a:lnSpc>
+            </a:pPr>
+            <a:r>
+              <a:rPr sz="640" b="0">
+                <a:solidFill>
+                  <a:srgbClr val="12151C"/>
+                </a:solidFill>
+                <a:latin typeface="맑은 고딕"/>
+                <a:ea typeface="맑은 고딕"/>
+              </a:rPr>
+              <a:t>평일 10:00 – 19:00</a:t>
+            </a:r>
+          </a:p>
+        </p:txBody>
+      </p:sp>
+      <p:sp>
+        <p:nvSpPr>
+          <p:cNvPr id="15" name="텍스트"/>
+          <p:cNvSpPr txBox="1"/>
+          <p:nvPr/>
+        </p:nvSpPr>
+        <p:spPr>
+          <a:xfrm>
+            <a:off x="252000" y="1580400"/>
+            <a:ext cx="396000" cy="91441"/>
+          </a:xfrm>
+          <a:prstGeom prst="rect">
+            <a:avLst/>
+          </a:prstGeom>
+          <a:noFill/>
+        </p:spPr>
+        <p:txBody>
+          <a:bodyPr wrap="square" lIns="0" rIns="0" tIns="0" bIns="0" anchor="t">
+            <a:spAutoFit/>
+          </a:bodyPr>
+          <a:lstStyle/>
+          <a:p>
+            <a:pPr algn="l">
+              <a:lnSpc>
+                <a:spcPts val="696"/>
+              </a:lnSpc>
+            </a:pPr>
+            <a:r>
+              <a:rPr sz="480" b="1" spc="140">
+                <a:solidFill>
+                  <a:srgbClr val="6C5911"/>
+                </a:solidFill>
+                <a:latin typeface="맑은 고딕"/>
+                <a:ea typeface="맑은 고딕"/>
+              </a:rPr>
+              <a:t>WEB</a:t>
+            </a:r>
+          </a:p>
+        </p:txBody>
+      </p:sp>
+      <p:sp>
+        <p:nvSpPr>
+          <p:cNvPr id="16" name="텍스트"/>
+          <p:cNvSpPr txBox="1"/>
+          <p:nvPr/>
+        </p:nvSpPr>
+        <p:spPr>
+          <a:xfrm>
+            <a:off x="648000" y="1569600"/>
+            <a:ext cx="2340000" cy="121921"/>
+          </a:xfrm>
+          <a:prstGeom prst="rect">
+            <a:avLst/>
+          </a:prstGeom>
+          <a:noFill/>
+        </p:spPr>
+        <p:txBody>
+          <a:bodyPr wrap="square" lIns="0" rIns="0" tIns="0" bIns="0" anchor="t">
+            <a:spAutoFit/>
+          </a:bodyPr>
+          <a:lstStyle/>
+          <a:p>
+            <a:pPr algn="l">
+              <a:lnSpc>
+                <a:spcPts val="927"/>
+              </a:lnSpc>
+            </a:pPr>
+            <a:r>
+              <a:rPr sz="640" b="0">
+                <a:solidFill>
+                  <a:srgbClr val="12151C"/>
+                </a:solidFill>
+                <a:latin typeface="맑은 고딕"/>
+                <a:ea typeface="맑은 고딕"/>
+              </a:rPr>
+              <a:t>www.example.com</a:t>
+            </a:r>
+          </a:p>
+        </p:txBody>
+      </p:sp>
+      <p:sp>
+        <p:nvSpPr>
+          <p:cNvPr id="17" name="텍스트"/>
+          <p:cNvSpPr txBox="1"/>
+          <p:nvPr/>
+        </p:nvSpPr>
+        <p:spPr>
+          <a:xfrm>
+            <a:off x="1548000" y="1411200"/>
+            <a:ext cx="1440000" cy="123826"/>
+          </a:xfrm>
+          <a:prstGeom prst="rect">
+            <a:avLst/>
+          </a:prstGeom>
+          <a:noFill/>
+        </p:spPr>
+        <p:txBody>
+          <a:bodyPr wrap="square" lIns="0" rIns="0" tIns="0" bIns="0" anchor="t">
+            <a:spAutoFit/>
+          </a:bodyPr>
+          <a:lstStyle/>
+          <a:p>
+            <a:pPr algn="r">
+              <a:lnSpc>
+                <a:spcPts val="942"/>
+              </a:lnSpc>
+            </a:pPr>
+            <a:r>
+              <a:rPr sz="650" b="1" spc="220">
+                <a:solidFill>
+                  <a:srgbClr val="6C5911"/>
+                </a:solidFill>
+                <a:latin typeface="맑은 고딕"/>
+                <a:ea typeface="맑은 고딕"/>
+              </a:rPr>
+              <a:t>회사 · 사무소 이름</a:t>
             </a:r>
           </a:p>
         </p:txBody>
